--- a/CropAI_Project_Presentation.pptx
+++ b/CropAI_Project_Presentation.pptx
@@ -11,12 +11,12 @@
     <p:sldId id="256" r:id="rId2"/>
     <p:sldId id="257" r:id="rId3"/>
     <p:sldId id="258" r:id="rId4"/>
-    <p:sldId id="259" r:id="rId5"/>
-    <p:sldId id="261" r:id="rId6"/>
-    <p:sldId id="262" r:id="rId7"/>
-    <p:sldId id="264" r:id="rId8"/>
-    <p:sldId id="265" r:id="rId9"/>
-    <p:sldId id="268" r:id="rId10"/>
+    <p:sldId id="268" r:id="rId5"/>
+    <p:sldId id="259" r:id="rId6"/>
+    <p:sldId id="261" r:id="rId7"/>
+    <p:sldId id="262" r:id="rId8"/>
+    <p:sldId id="264" r:id="rId9"/>
+    <p:sldId id="265" r:id="rId10"/>
     <p:sldId id="267" r:id="rId11"/>
   </p:sldIdLst>
   <p:sldSz cx="9144000" cy="5143500" type="screen16x9"/>
@@ -563,7 +563,7 @@
           <a:p>
             <a:fld id="{F7021451-1387-4CA6-816F-3879F97B5CBC}" type="slidenum">
               <a:rPr lang="en-US"/>
-              <a:t>4</a:t>
+              <a:t>5</a:t>
             </a:fld>
             <a:endParaRPr lang="en-US"/>
           </a:p>
@@ -647,7 +647,7 @@
           <a:p>
             <a:fld id="{F7021451-1387-4CA6-816F-3879F97B5CBC}" type="slidenum">
               <a:rPr lang="en-US"/>
-              <a:t>5</a:t>
+              <a:t>6</a:t>
             </a:fld>
             <a:endParaRPr lang="en-US"/>
           </a:p>
@@ -731,7 +731,7 @@
           <a:p>
             <a:fld id="{F7021451-1387-4CA6-816F-3879F97B5CBC}" type="slidenum">
               <a:rPr lang="en-US"/>
-              <a:t>6</a:t>
+              <a:t>7</a:t>
             </a:fld>
             <a:endParaRPr lang="en-US"/>
           </a:p>
@@ -815,7 +815,7 @@
           <a:p>
             <a:fld id="{F7021451-1387-4CA6-816F-3879F97B5CBC}" type="slidenum">
               <a:rPr lang="en-US"/>
-              <a:t>7</a:t>
+              <a:t>8</a:t>
             </a:fld>
             <a:endParaRPr lang="en-US"/>
           </a:p>
@@ -899,7 +899,7 @@
           <a:p>
             <a:fld id="{F7021451-1387-4CA6-816F-3879F97B5CBC}" type="slidenum">
               <a:rPr lang="en-US"/>
-              <a:t>8</a:t>
+              <a:t>9</a:t>
             </a:fld>
             <a:endParaRPr lang="en-US"/>
           </a:p>
@@ -2803,6 +2803,137 @@
 
 <file path=ppt/slides/slide4.xml><?xml version="1.0" encoding="utf-8"?>
 <p:sld xmlns:a="http://schemas.openxmlformats.org/drawingml/2006/main" xmlns:r="http://schemas.openxmlformats.org/officeDocument/2006/relationships" xmlns:p="http://schemas.openxmlformats.org/presentationml/2006/main">
+  <p:cSld>
+    <p:spTree>
+      <p:nvGrpSpPr>
+        <p:cNvPr id="1" name=""/>
+        <p:cNvGrpSpPr/>
+        <p:nvPr/>
+      </p:nvGrpSpPr>
+      <p:grpSpPr>
+        <a:xfrm>
+          <a:off x="0" y="0"/>
+          <a:ext cx="0" cy="0"/>
+          <a:chOff x="0" y="0"/>
+          <a:chExt cx="0" cy="0"/>
+        </a:xfrm>
+      </p:grpSpPr>
+      <p:pic>
+        <p:nvPicPr>
+          <p:cNvPr id="6" name="Picture 5">
+            <a:extLst>
+              <a:ext uri="{FF2B5EF4-FFF2-40B4-BE49-F238E27FC236}">
+                <a16:creationId xmlns:a16="http://schemas.microsoft.com/office/drawing/2014/main" id="{90FD9D39-B2D7-3972-8DB8-4ED72FF16397}"/>
+              </a:ext>
+            </a:extLst>
+          </p:cNvPr>
+          <p:cNvPicPr>
+            <a:picLocks/>
+          </p:cNvPicPr>
+          <p:nvPr/>
+        </p:nvPicPr>
+        <p:blipFill>
+          <a:blip r:embed="rId2"/>
+          <a:stretch>
+            <a:fillRect/>
+          </a:stretch>
+        </p:blipFill>
+        <p:spPr>
+          <a:xfrm>
+            <a:off x="101600" y="456292"/>
+            <a:ext cx="4318000" cy="2871944"/>
+          </a:xfrm>
+          <a:prstGeom prst="rect">
+            <a:avLst/>
+          </a:prstGeom>
+        </p:spPr>
+      </p:pic>
+      <p:pic>
+        <p:nvPicPr>
+          <p:cNvPr id="8" name="Picture 7">
+            <a:extLst>
+              <a:ext uri="{FF2B5EF4-FFF2-40B4-BE49-F238E27FC236}">
+                <a16:creationId xmlns:a16="http://schemas.microsoft.com/office/drawing/2014/main" id="{A094CA56-5F5D-99CF-B4F2-43F637D8634C}"/>
+              </a:ext>
+            </a:extLst>
+          </p:cNvPr>
+          <p:cNvPicPr>
+            <a:picLocks/>
+          </p:cNvPicPr>
+          <p:nvPr/>
+        </p:nvPicPr>
+        <p:blipFill>
+          <a:blip r:embed="rId3"/>
+          <a:stretch>
+            <a:fillRect/>
+          </a:stretch>
+        </p:blipFill>
+        <p:spPr>
+          <a:xfrm>
+            <a:off x="4572000" y="459085"/>
+            <a:ext cx="4318000" cy="2871944"/>
+          </a:xfrm>
+          <a:prstGeom prst="rect">
+            <a:avLst/>
+          </a:prstGeom>
+        </p:spPr>
+      </p:pic>
+      <p:sp>
+        <p:nvSpPr>
+          <p:cNvPr id="3" name="TextBox 2">
+            <a:extLst>
+              <a:ext uri="{FF2B5EF4-FFF2-40B4-BE49-F238E27FC236}">
+                <a16:creationId xmlns:a16="http://schemas.microsoft.com/office/drawing/2014/main" id="{1C88D0F1-E70E-DCB3-AE49-2F69088ED1D5}"/>
+              </a:ext>
+            </a:extLst>
+          </p:cNvPr>
+          <p:cNvSpPr txBox="1"/>
+          <p:nvPr/>
+        </p:nvSpPr>
+        <p:spPr>
+          <a:xfrm>
+            <a:off x="4470400" y="3311321"/>
+            <a:ext cx="4572000" cy="1477328"/>
+          </a:xfrm>
+          <a:prstGeom prst="rect">
+            <a:avLst/>
+          </a:prstGeom>
+          <a:noFill/>
+        </p:spPr>
+        <p:txBody>
+          <a:bodyPr wrap="square">
+            <a:spAutoFit/>
+          </a:bodyPr>
+          <a:lstStyle/>
+          <a:p>
+            <a:r>
+              <a:rPr lang="en-US" b="0" i="0" dirty="0">
+                <a:effectLst/>
+                <a:latin typeface="Georgia" panose="02040502050405020303" pitchFamily="18" charset="0"/>
+              </a:rPr>
+              <a:t>This feature-importance chart shows which variables had the strongest influence on the Random Forest model. It helps explain which crop and field factors mattered most in the prediction process.</a:t>
+            </a:r>
+            <a:endParaRPr lang="en-CA" dirty="0">
+              <a:latin typeface="Georgia" panose="02040502050405020303" pitchFamily="18" charset="0"/>
+            </a:endParaRPr>
+          </a:p>
+        </p:txBody>
+      </p:sp>
+    </p:spTree>
+    <p:extLst>
+      <p:ext uri="{BB962C8B-B14F-4D97-AF65-F5344CB8AC3E}">
+        <p14:creationId xmlns:p14="http://schemas.microsoft.com/office/powerpoint/2010/main" val="1606388332"/>
+      </p:ext>
+    </p:extLst>
+  </p:cSld>
+  <p:clrMapOvr>
+    <a:masterClrMapping/>
+  </p:clrMapOvr>
+</p:sld>
+</file>
+
+<file path=ppt/slides/slide5.xml><?xml version="1.0" encoding="utf-8"?>
+<p:sld xmlns:a="http://schemas.openxmlformats.org/drawingml/2006/main" xmlns:r="http://schemas.openxmlformats.org/officeDocument/2006/relationships" xmlns:p="http://schemas.openxmlformats.org/presentationml/2006/main">
   <p:cSld name="Slide 4">
     <p:bg>
       <p:bgPr>
@@ -3778,7 +3909,7 @@
 </p:sld>
 </file>
 
-<file path=ppt/slides/slide5.xml><?xml version="1.0" encoding="utf-8"?>
+<file path=ppt/slides/slide6.xml><?xml version="1.0" encoding="utf-8"?>
 <p:sld xmlns:a="http://schemas.openxmlformats.org/drawingml/2006/main" xmlns:r="http://schemas.openxmlformats.org/officeDocument/2006/relationships" xmlns:p="http://schemas.openxmlformats.org/presentationml/2006/main">
   <p:cSld name="Slide 6">
     <p:bg>
@@ -4631,7 +4762,7 @@
 </p:sld>
 </file>
 
-<file path=ppt/slides/slide6.xml><?xml version="1.0" encoding="utf-8"?>
+<file path=ppt/slides/slide7.xml><?xml version="1.0" encoding="utf-8"?>
 <p:sld xmlns:a="http://schemas.openxmlformats.org/drawingml/2006/main" xmlns:r="http://schemas.openxmlformats.org/officeDocument/2006/relationships" xmlns:p="http://schemas.openxmlformats.org/presentationml/2006/main">
   <p:cSld name="Slide 7">
     <p:bg>
@@ -5737,7 +5868,7 @@
 </p:sld>
 </file>
 
-<file path=ppt/slides/slide7.xml><?xml version="1.0" encoding="utf-8"?>
+<file path=ppt/slides/slide8.xml><?xml version="1.0" encoding="utf-8"?>
 <p:sld xmlns:a="http://schemas.openxmlformats.org/drawingml/2006/main" xmlns:r="http://schemas.openxmlformats.org/officeDocument/2006/relationships" xmlns:p="http://schemas.openxmlformats.org/presentationml/2006/main">
   <p:cSld name="Slide 9">
     <p:bg>
@@ -6275,7 +6406,7 @@
 </p:sld>
 </file>
 
-<file path=ppt/slides/slide8.xml><?xml version="1.0" encoding="utf-8"?>
+<file path=ppt/slides/slide9.xml><?xml version="1.0" encoding="utf-8"?>
 <p:sld xmlns:a="http://schemas.openxmlformats.org/drawingml/2006/main" xmlns:r="http://schemas.openxmlformats.org/officeDocument/2006/relationships" xmlns:p="http://schemas.openxmlformats.org/presentationml/2006/main">
   <p:cSld name="Slide 10">
     <p:bg>
@@ -6381,7 +6512,7 @@
         <p:spPr>
           <a:xfrm>
             <a:off x="587828" y="1567543"/>
-            <a:ext cx="4796972" cy="2937300"/>
+            <a:ext cx="4796972" cy="2554545"/>
           </a:xfrm>
           <a:prstGeom prst="rect">
             <a:avLst/>
@@ -6440,15 +6571,6 @@
               </a:rPr>
               <a:t>Integrate real-time sensor or weather data</a:t>
             </a:r>
-          </a:p>
-          <a:p>
-            <a:pPr marL="285750" indent="-285750">
-              <a:buFont typeface="Arial" panose="020B0604020202020204" pitchFamily="34" charset="0"/>
-              <a:buChar char="•"/>
-            </a:pPr>
-            <a:endParaRPr lang="en-CA" sz="2000" dirty="0">
-              <a:latin typeface="Georgia" panose="02040502050405020303" pitchFamily="18" charset="0"/>
-            </a:endParaRPr>
           </a:p>
         </p:txBody>
       </p:sp>
@@ -6500,137 +6622,6 @@
         </p:spPr>
       </p:pic>
     </p:spTree>
-  </p:cSld>
-  <p:clrMapOvr>
-    <a:masterClrMapping/>
-  </p:clrMapOvr>
-</p:sld>
-</file>
-
-<file path=ppt/slides/slide9.xml><?xml version="1.0" encoding="utf-8"?>
-<p:sld xmlns:a="http://schemas.openxmlformats.org/drawingml/2006/main" xmlns:r="http://schemas.openxmlformats.org/officeDocument/2006/relationships" xmlns:p="http://schemas.openxmlformats.org/presentationml/2006/main">
-  <p:cSld>
-    <p:spTree>
-      <p:nvGrpSpPr>
-        <p:cNvPr id="1" name=""/>
-        <p:cNvGrpSpPr/>
-        <p:nvPr/>
-      </p:nvGrpSpPr>
-      <p:grpSpPr>
-        <a:xfrm>
-          <a:off x="0" y="0"/>
-          <a:ext cx="0" cy="0"/>
-          <a:chOff x="0" y="0"/>
-          <a:chExt cx="0" cy="0"/>
-        </a:xfrm>
-      </p:grpSpPr>
-      <p:pic>
-        <p:nvPicPr>
-          <p:cNvPr id="6" name="Picture 5">
-            <a:extLst>
-              <a:ext uri="{FF2B5EF4-FFF2-40B4-BE49-F238E27FC236}">
-                <a16:creationId xmlns:a16="http://schemas.microsoft.com/office/drawing/2014/main" id="{90FD9D39-B2D7-3972-8DB8-4ED72FF16397}"/>
-              </a:ext>
-            </a:extLst>
-          </p:cNvPr>
-          <p:cNvPicPr>
-            <a:picLocks/>
-          </p:cNvPicPr>
-          <p:nvPr/>
-        </p:nvPicPr>
-        <p:blipFill>
-          <a:blip r:embed="rId2"/>
-          <a:stretch>
-            <a:fillRect/>
-          </a:stretch>
-        </p:blipFill>
-        <p:spPr>
-          <a:xfrm>
-            <a:off x="101600" y="456292"/>
-            <a:ext cx="4318000" cy="2871944"/>
-          </a:xfrm>
-          <a:prstGeom prst="rect">
-            <a:avLst/>
-          </a:prstGeom>
-        </p:spPr>
-      </p:pic>
-      <p:pic>
-        <p:nvPicPr>
-          <p:cNvPr id="8" name="Picture 7">
-            <a:extLst>
-              <a:ext uri="{FF2B5EF4-FFF2-40B4-BE49-F238E27FC236}">
-                <a16:creationId xmlns:a16="http://schemas.microsoft.com/office/drawing/2014/main" id="{A094CA56-5F5D-99CF-B4F2-43F637D8634C}"/>
-              </a:ext>
-            </a:extLst>
-          </p:cNvPr>
-          <p:cNvPicPr>
-            <a:picLocks/>
-          </p:cNvPicPr>
-          <p:nvPr/>
-        </p:nvPicPr>
-        <p:blipFill>
-          <a:blip r:embed="rId3"/>
-          <a:stretch>
-            <a:fillRect/>
-          </a:stretch>
-        </p:blipFill>
-        <p:spPr>
-          <a:xfrm>
-            <a:off x="4572000" y="459085"/>
-            <a:ext cx="4318000" cy="2871944"/>
-          </a:xfrm>
-          <a:prstGeom prst="rect">
-            <a:avLst/>
-          </a:prstGeom>
-        </p:spPr>
-      </p:pic>
-      <p:sp>
-        <p:nvSpPr>
-          <p:cNvPr id="3" name="TextBox 2">
-            <a:extLst>
-              <a:ext uri="{FF2B5EF4-FFF2-40B4-BE49-F238E27FC236}">
-                <a16:creationId xmlns:a16="http://schemas.microsoft.com/office/drawing/2014/main" id="{1C88D0F1-E70E-DCB3-AE49-2F69088ED1D5}"/>
-              </a:ext>
-            </a:extLst>
-          </p:cNvPr>
-          <p:cNvSpPr txBox="1"/>
-          <p:nvPr/>
-        </p:nvSpPr>
-        <p:spPr>
-          <a:xfrm>
-            <a:off x="4470400" y="3311321"/>
-            <a:ext cx="4572000" cy="1477328"/>
-          </a:xfrm>
-          <a:prstGeom prst="rect">
-            <a:avLst/>
-          </a:prstGeom>
-          <a:noFill/>
-        </p:spPr>
-        <p:txBody>
-          <a:bodyPr wrap="square">
-            <a:spAutoFit/>
-          </a:bodyPr>
-          <a:lstStyle/>
-          <a:p>
-            <a:r>
-              <a:rPr lang="en-US" b="0" i="0" dirty="0">
-                <a:effectLst/>
-                <a:latin typeface="Georgia" panose="02040502050405020303" pitchFamily="18" charset="0"/>
-              </a:rPr>
-              <a:t>This feature-importance chart shows which variables had the strongest influence on the Random Forest model. It helps explain which crop and field factors mattered most in the prediction process.</a:t>
-            </a:r>
-            <a:endParaRPr lang="en-CA" dirty="0">
-              <a:latin typeface="Georgia" panose="02040502050405020303" pitchFamily="18" charset="0"/>
-            </a:endParaRPr>
-          </a:p>
-        </p:txBody>
-      </p:sp>
-    </p:spTree>
-    <p:extLst>
-      <p:ext uri="{BB962C8B-B14F-4D97-AF65-F5344CB8AC3E}">
-        <p14:creationId xmlns:p14="http://schemas.microsoft.com/office/powerpoint/2010/main" val="1606388332"/>
-      </p:ext>
-    </p:extLst>
   </p:cSld>
   <p:clrMapOvr>
     <a:masterClrMapping/>

--- a/CropAI_Project_Presentation.pptx
+++ b/CropAI_Project_Presentation.pptx
@@ -2892,8 +2892,8 @@
         </p:nvSpPr>
         <p:spPr>
           <a:xfrm>
-            <a:off x="4470400" y="3311321"/>
-            <a:ext cx="4572000" cy="1477328"/>
+            <a:off x="4572000" y="3331029"/>
+            <a:ext cx="4572000" cy="1200329"/>
           </a:xfrm>
           <a:prstGeom prst="rect">
             <a:avLst/>
@@ -2907,11 +2907,51 @@
           <a:lstStyle/>
           <a:p>
             <a:r>
+              <a:rPr lang="en-US" dirty="0">
+                <a:latin typeface="Georgia" panose="02040502050405020303" pitchFamily="18" charset="0"/>
+              </a:rPr>
+              <a:t>The right graph shows the feature importance from the Random Forest model. It explains which input variables had the biggest influence on the prediction.</a:t>
+            </a:r>
+            <a:endParaRPr lang="en-CA" dirty="0">
+              <a:latin typeface="Georgia" panose="02040502050405020303" pitchFamily="18" charset="0"/>
+            </a:endParaRPr>
+          </a:p>
+        </p:txBody>
+      </p:sp>
+      <p:sp>
+        <p:nvSpPr>
+          <p:cNvPr id="4" name="TextBox 3">
+            <a:extLst>
+              <a:ext uri="{FF2B5EF4-FFF2-40B4-BE49-F238E27FC236}">
+                <a16:creationId xmlns:a16="http://schemas.microsoft.com/office/drawing/2014/main" id="{E2AFACAA-3DDD-DA53-7D22-7E5EB9CBC98F}"/>
+              </a:ext>
+            </a:extLst>
+          </p:cNvPr>
+          <p:cNvSpPr txBox="1"/>
+          <p:nvPr/>
+        </p:nvSpPr>
+        <p:spPr>
+          <a:xfrm>
+            <a:off x="225425" y="3331029"/>
+            <a:ext cx="4070350" cy="1754326"/>
+          </a:xfrm>
+          <a:prstGeom prst="rect">
+            <a:avLst/>
+          </a:prstGeom>
+          <a:noFill/>
+        </p:spPr>
+        <p:txBody>
+          <a:bodyPr wrap="square">
+            <a:spAutoFit/>
+          </a:bodyPr>
+          <a:lstStyle/>
+          <a:p>
+            <a:r>
               <a:rPr lang="en-US" b="0" i="0" dirty="0">
                 <a:effectLst/>
                 <a:latin typeface="Georgia" panose="02040502050405020303" pitchFamily="18" charset="0"/>
               </a:rPr>
-              <a:t>This feature-importance chart shows which variables had the strongest influence on the Random Forest model. It helps explain which crop and field factors mattered most in the prediction process.</a:t>
+              <a:t>The graphs show how healthy and unhealthy wheat samples are distributed across different feature pairs in the dataset. It helps us visually explore relationships between important variables.</a:t>
             </a:r>
             <a:endParaRPr lang="en-CA" dirty="0">
               <a:latin typeface="Georgia" panose="02040502050405020303" pitchFamily="18" charset="0"/>
@@ -3225,7 +3265,7 @@
         </p:nvSpPr>
         <p:spPr>
           <a:xfrm>
-            <a:off x="1881187" y="3167540"/>
+            <a:off x="466721" y="3158767"/>
             <a:ext cx="2543175" cy="1704500"/>
           </a:xfrm>
           <a:prstGeom prst="rect">
@@ -3258,7 +3298,7 @@
         </p:nvSpPr>
         <p:spPr>
           <a:xfrm>
-            <a:off x="1881187" y="3167539"/>
+            <a:off x="466721" y="3158766"/>
             <a:ext cx="53594" cy="1704501"/>
           </a:xfrm>
           <a:prstGeom prst="rect">
@@ -3291,7 +3331,7 @@
         </p:nvSpPr>
         <p:spPr>
           <a:xfrm>
-            <a:off x="2018348" y="3304699"/>
+            <a:off x="603882" y="3295926"/>
             <a:ext cx="2255996" cy="397929"/>
           </a:xfrm>
           <a:prstGeom prst="rect">
@@ -3336,7 +3376,7 @@
         </p:nvSpPr>
         <p:spPr>
           <a:xfrm>
-            <a:off x="2092642" y="3711196"/>
+            <a:off x="678176" y="3702423"/>
             <a:ext cx="2255995" cy="1077218"/>
           </a:xfrm>
           <a:prstGeom prst="rect">
@@ -3575,7 +3615,7 @@
         </p:nvSpPr>
         <p:spPr>
           <a:xfrm>
-            <a:off x="4719640" y="3173453"/>
+            <a:off x="3305174" y="3164680"/>
             <a:ext cx="2543175" cy="1704500"/>
           </a:xfrm>
           <a:prstGeom prst="rect">
@@ -3608,7 +3648,7 @@
         </p:nvSpPr>
         <p:spPr>
           <a:xfrm>
-            <a:off x="4719640" y="3173452"/>
+            <a:off x="3305174" y="3164679"/>
             <a:ext cx="53594" cy="1704501"/>
           </a:xfrm>
           <a:prstGeom prst="rect">
@@ -3641,7 +3681,7 @@
         </p:nvSpPr>
         <p:spPr>
           <a:xfrm>
-            <a:off x="4856801" y="3310612"/>
+            <a:off x="3442335" y="3301839"/>
             <a:ext cx="2255996" cy="397929"/>
           </a:xfrm>
           <a:prstGeom prst="rect">
@@ -3686,7 +3726,7 @@
         </p:nvSpPr>
         <p:spPr>
           <a:xfrm>
-            <a:off x="4957068" y="3717030"/>
+            <a:off x="3542602" y="3708257"/>
             <a:ext cx="2202400" cy="584775"/>
           </a:xfrm>
           <a:prstGeom prst="rect">
@@ -3872,7 +3912,7 @@
               <a:rPr lang="en-CA" sz="1600" dirty="0">
                 <a:latin typeface="Georgia" panose="02040502050405020303" pitchFamily="18" charset="0"/>
               </a:rPr>
-              <a:t>NDVI</a:t>
+              <a:t>NDVI*</a:t>
             </a:r>
           </a:p>
           <a:p>
@@ -3884,7 +3924,7 @@
               <a:rPr lang="en-CA" sz="1600" dirty="0">
                 <a:latin typeface="Georgia" panose="02040502050405020303" pitchFamily="18" charset="0"/>
               </a:rPr>
-              <a:t>SAVI</a:t>
+              <a:t>SAVI*</a:t>
             </a:r>
           </a:p>
           <a:p>
@@ -3898,6 +3938,74 @@
               </a:rPr>
               <a:t>Chlorophyll content</a:t>
             </a:r>
+          </a:p>
+        </p:txBody>
+      </p:sp>
+      <p:sp>
+        <p:nvSpPr>
+          <p:cNvPr id="3" name="TextBox 2">
+            <a:extLst>
+              <a:ext uri="{FF2B5EF4-FFF2-40B4-BE49-F238E27FC236}">
+                <a16:creationId xmlns:a16="http://schemas.microsoft.com/office/drawing/2014/main" id="{60503F8D-2376-661C-C64A-AECDFF6BE8CD}"/>
+              </a:ext>
+            </a:extLst>
+          </p:cNvPr>
+          <p:cNvSpPr txBox="1"/>
+          <p:nvPr/>
+        </p:nvSpPr>
+        <p:spPr>
+          <a:xfrm>
+            <a:off x="6083400" y="3154563"/>
+            <a:ext cx="2382424" cy="1600438"/>
+          </a:xfrm>
+          <a:prstGeom prst="rect">
+            <a:avLst/>
+          </a:prstGeom>
+          <a:noFill/>
+        </p:spPr>
+        <p:txBody>
+          <a:bodyPr wrap="square">
+            <a:spAutoFit/>
+          </a:bodyPr>
+          <a:lstStyle/>
+          <a:p>
+            <a:pPr marL="285750" indent="-285750">
+              <a:buFont typeface="Arial" panose="020B0604020202020204" pitchFamily="34" charset="0"/>
+              <a:buChar char="•"/>
+            </a:pPr>
+            <a:r>
+              <a:rPr lang="en-US" sz="1400" b="1" dirty="0">
+                <a:latin typeface="Georgia" panose="02040502050405020303" pitchFamily="18" charset="0"/>
+              </a:rPr>
+              <a:t>NDVI</a:t>
+            </a:r>
+            <a:r>
+              <a:rPr lang="en-US" sz="1400" dirty="0">
+                <a:latin typeface="Georgia" panose="02040502050405020303" pitchFamily="18" charset="0"/>
+              </a:rPr>
+              <a:t> gives a general signal of vegetation health</a:t>
+            </a:r>
+          </a:p>
+          <a:p>
+            <a:pPr marL="285750" indent="-285750">
+              <a:buFont typeface="Arial" panose="020B0604020202020204" pitchFamily="34" charset="0"/>
+              <a:buChar char="•"/>
+            </a:pPr>
+            <a:r>
+              <a:rPr lang="en-US" sz="1400" b="1" dirty="0">
+                <a:latin typeface="Georgia" panose="02040502050405020303" pitchFamily="18" charset="0"/>
+              </a:rPr>
+              <a:t>SAVI</a:t>
+            </a:r>
+            <a:r>
+              <a:rPr lang="en-US" sz="1400" dirty="0">
+                <a:latin typeface="Georgia" panose="02040502050405020303" pitchFamily="18" charset="0"/>
+              </a:rPr>
+              <a:t> gives a similar signal but with better correction for soil influence</a:t>
+            </a:r>
+            <a:endParaRPr lang="en-CA" sz="1400" dirty="0">
+              <a:latin typeface="Georgia" panose="02040502050405020303" pitchFamily="18" charset="0"/>
+            </a:endParaRPr>
           </a:p>
         </p:txBody>
       </p:sp>
